--- a/media/resources/files/Ekvivalenettuuluk_BOP_iREETTOO_EstafetaOyunu_qyQps4D.pptx
+++ b/media/resources/files/Ekvivalenettuuluk_BOP_iREETTOO_EstafetaOyunu_qyQps4D.pptx
@@ -28127,7 +28127,7 @@
             </a:pPr>
             <a:r>
               <a:rPr lang="ru-RU" sz="3200" dirty="0"/>
-              <a:t>Турдуу пикирлер учун ыраазычылык билдиребиз.</a:t>
+              <a:t>Түрдүү пикирлер үчүн ыраазычылык билдиребиз.</a:t>
             </a:r>
           </a:p>
           <a:p>

--- a/media/resources/files/Ekvivalenettuuluk_BOP_iREETTOO_EstafetaOyunu_qyQps4D.pptx
+++ b/media/resources/files/Ekvivalenettuuluk_BOP_iREETTOO_EstafetaOyunu_qyQps4D.pptx
@@ -3994,7 +3994,7 @@
           <a:p>
             <a:r>
               <a:rPr lang="ru-RU" dirty="0"/>
-              <a:t>Бөлчөктөрдү, ондуктарды жана пайыздарды иреттөө – </a:t>
+              <a:t>Бөлчөктөрдү, ондуктарды жана пайыздарды ирээттөө – </a:t>
             </a:r>
             <a:r>
               <a:rPr lang="ru-RU" b="1" dirty="0"/>
@@ -4026,7 +4026,7 @@
           <a:p>
             <a:r>
               <a:rPr lang="ru-RU" dirty="0"/>
-              <a:t>Эгерде студенттер туура эмес болсо, алар суроону өткөрүп жибериши мүмкүн же 1</a:t>
+              <a:t>Туура чыкпаса, окуучу суроону өткөрүп жибериши мүмкүн, же 1</a:t>
             </a:r>
             <a:r>
               <a:rPr lang="en-US" dirty="0"/>
@@ -4034,11 +4034,11 @@
             </a:r>
             <a:r>
               <a:rPr lang="ky-KG" dirty="0"/>
-              <a:t>упай берилип</a:t>
+              <a:t>упай,</a:t>
             </a:r>
             <a:r>
               <a:rPr lang="ru-RU" dirty="0"/>
-              <a:t> же андан башка мүмкүнчүлүк берилет </a:t>
+              <a:t> же дагы бир мүмкүнчүлүк алат. </a:t>
             </a:r>
             <a:endParaRPr lang="en-US" dirty="0"/>
           </a:p>
@@ -7636,7 +7636,7 @@
             <a:pPr algn="ctr"/>
             <a:r>
               <a:rPr lang="ky-KG" sz="1600" dirty="0"/>
-              <a:t>Бул сандар өлчөмүнө жараша иреттелген.</a:t>
+              <a:t>Бул сандар өлчөмүнө жараша ирээттелген.</a:t>
             </a:r>
           </a:p>
           <a:p>
@@ -9769,7 +9769,7 @@
             <a:pPr algn="ctr"/>
             <a:r>
               <a:rPr lang="ru-RU" sz="1600" dirty="0"/>
-              <a:t>Бул сандарды чоңдон кичинеге карай иретте.</a:t>
+              <a:t>Бул сандарды чоңдон кичинеге карай ирээтте.</a:t>
             </a:r>
             <a:endParaRPr lang="en-GB" sz="1600" dirty="0"/>
           </a:p>
@@ -10061,7 +10061,7 @@
             <a:pPr algn="ctr"/>
             <a:r>
               <a:rPr lang="ru-RU" sz="1600" dirty="0"/>
-              <a:t>Бул сандарды чоңдон кичинеге карай иретте.</a:t>
+              <a:t>Бул сандарды чоңдон кичинеге карай ирээтте.</a:t>
             </a:r>
             <a:endParaRPr lang="en-GB" sz="1600" dirty="0"/>
           </a:p>
@@ -10474,7 +10474,7 @@
             <a:pPr algn="ctr"/>
             <a:r>
               <a:rPr lang="ru-RU" sz="1600" dirty="0"/>
-              <a:t>Бул сандарды эң кичинеден чоңго карай иретте.</a:t>
+              <a:t>Бул сандарды эң кичинеден чоңго карай ирээтте.</a:t>
             </a:r>
             <a:endParaRPr lang="en-GB" sz="1600" dirty="0"/>
           </a:p>
@@ -10881,7 +10881,7 @@
             <a:pPr algn="ctr"/>
             <a:r>
               <a:rPr lang="ru-RU" sz="1600" dirty="0"/>
-              <a:t>Бул сандарды эң кичинеден чоңго карай иретте.</a:t>
+              <a:t>Бул сандарды эң кичинеден чоңго карай ирээтте.</a:t>
             </a:r>
             <a:endParaRPr lang="en-GB" sz="1600" dirty="0"/>
           </a:p>
@@ -14773,7 +14773,7 @@
                   <a:srgbClr val="00B0F0"/>
                 </a:solidFill>
               </a:rPr>
-              <a:t>0.66</a:t>
+              <a:t>0,66</a:t>
             </a:r>
             <a:endParaRPr lang="en-GB" sz="1950" b="1" dirty="0">
               <a:solidFill>
@@ -17659,7 +17659,7 @@
                   <a:srgbClr val="00B0F0"/>
                 </a:solidFill>
               </a:rPr>
-              <a:t>0.34</a:t>
+              <a:t>0,34</a:t>
             </a:r>
             <a:endParaRPr lang="en-GB" sz="1950" b="1" dirty="0">
               <a:solidFill>
@@ -17700,7 +17700,7 @@
             <a:pPr algn="ctr"/>
             <a:r>
               <a:rPr lang="ky-KG" sz="1600" dirty="0"/>
-              <a:t>Бул сандар өлчөмүнө жараша иреттелген.</a:t>
+              <a:t>Бул сандар өлчөмүнө жараша ирээттелген.</a:t>
             </a:r>
           </a:p>
           <a:p>
@@ -19384,7 +19384,7 @@
                   <a:srgbClr val="00B0F0"/>
                 </a:solidFill>
               </a:rPr>
-              <a:t>0.65</a:t>
+              <a:t>0,65</a:t>
             </a:r>
             <a:endParaRPr lang="en-US" b="1" dirty="0">
               <a:solidFill>
@@ -19428,7 +19428,7 @@
                   <a:srgbClr val="00B0F0"/>
                 </a:solidFill>
               </a:rPr>
-              <a:t>0.68</a:t>
+              <a:t>0,68</a:t>
             </a:r>
             <a:endParaRPr lang="en-US" dirty="0">
               <a:solidFill>
@@ -19514,7 +19514,7 @@
                   <a:srgbClr val="00B0F0"/>
                 </a:solidFill>
               </a:rPr>
-              <a:t>0.35</a:t>
+              <a:t>0,35</a:t>
             </a:r>
             <a:endParaRPr lang="en-US" b="1" dirty="0">
               <a:solidFill>
@@ -19558,7 +19558,7 @@
                   <a:srgbClr val="00B0F0"/>
                 </a:solidFill>
               </a:rPr>
-              <a:t>0.33</a:t>
+              <a:t>0,33</a:t>
             </a:r>
             <a:endParaRPr lang="en-US" b="1" dirty="0">
               <a:solidFill>
@@ -19602,7 +19602,7 @@
                   <a:srgbClr val="00B0F0"/>
                 </a:solidFill>
               </a:rPr>
-              <a:t>0.09</a:t>
+              <a:t>0,09</a:t>
             </a:r>
             <a:endParaRPr lang="en-US" b="1" dirty="0">
               <a:solidFill>
@@ -19817,7 +19817,7 @@
                   <a:srgbClr val="00B0F0"/>
                 </a:solidFill>
               </a:rPr>
-              <a:t>0.49</a:t>
+              <a:t>0,49</a:t>
             </a:r>
             <a:endParaRPr lang="en-US" b="1" dirty="0">
               <a:solidFill>
@@ -20767,7 +20767,7 @@
             <a:pPr algn="ctr"/>
             <a:r>
               <a:rPr lang="ru-RU" sz="1600" dirty="0"/>
-              <a:t>Бул сандарды чоңдон кичинеге карай иретте.</a:t>
+              <a:t>Бул сандарды чоңдон кичинеге карай ирээтте.</a:t>
             </a:r>
             <a:endParaRPr lang="en-GB" sz="1600" dirty="0"/>
           </a:p>
@@ -21059,7 +21059,7 @@
             <a:pPr algn="ctr"/>
             <a:r>
               <a:rPr lang="ru-RU" sz="1600" dirty="0"/>
-              <a:t>Бул сандарды чоңдон кичинеге карай иретте.</a:t>
+              <a:t>Бул сандарды чоңдон кичинеге карай ирээтте.</a:t>
             </a:r>
             <a:endParaRPr lang="en-GB" sz="1600" dirty="0"/>
           </a:p>
@@ -21472,7 +21472,7 @@
             <a:pPr algn="ctr"/>
             <a:r>
               <a:rPr lang="ru-RU" sz="1600" dirty="0"/>
-              <a:t>Бул сандарды эң кичинеден чоңго карай иретте.</a:t>
+              <a:t>Бул сандарды эң кичинеден чоңго карай ирээтте.</a:t>
             </a:r>
             <a:endParaRPr lang="en-GB" sz="1600" dirty="0"/>
           </a:p>
@@ -21879,7 +21879,7 @@
             <a:pPr algn="ctr"/>
             <a:r>
               <a:rPr lang="ru-RU" sz="1600" dirty="0"/>
-              <a:t>Бул сандарды эң кичинеден чоңго карай иретте.</a:t>
+              <a:t>Бул сандарды эң кичинеден чоңго карай ирээтте.</a:t>
             </a:r>
             <a:endParaRPr lang="en-GB" sz="1600" dirty="0"/>
           </a:p>
@@ -25298,7 +25298,7 @@
                   <a:srgbClr val="00B0F0"/>
                 </a:solidFill>
               </a:rPr>
-              <a:t>0.9</a:t>
+              <a:t>0,9</a:t>
             </a:r>
             <a:endParaRPr lang="en-US" b="1" dirty="0">
               <a:solidFill>
@@ -25684,7 +25684,7 @@
                   <a:srgbClr val="00B0F0"/>
                 </a:solidFill>
               </a:rPr>
-              <a:t>0.701</a:t>
+              <a:t>0,701</a:t>
             </a:r>
             <a:endParaRPr lang="en-US" b="1" dirty="0">
               <a:solidFill>
@@ -25728,7 +25728,7 @@
                   <a:srgbClr val="00B0F0"/>
                 </a:solidFill>
               </a:rPr>
-              <a:t>1.5%</a:t>
+              <a:t>1,5%</a:t>
             </a:r>
             <a:endParaRPr lang="en-US" b="1" dirty="0">
               <a:solidFill>
@@ -25899,7 +25899,7 @@
                   <a:srgbClr val="00B0F0"/>
                 </a:solidFill>
               </a:rPr>
-              <a:t>0.099</a:t>
+              <a:t>0,099</a:t>
             </a:r>
             <a:endParaRPr lang="en-US" b="1" dirty="0">
               <a:solidFill>
@@ -26070,7 +26070,7 @@
                   <a:srgbClr val="00B0F0"/>
                 </a:solidFill>
               </a:rPr>
-              <a:t>102.9%</a:t>
+              <a:t>102,9%</a:t>
             </a:r>
             <a:endParaRPr lang="en-US" b="1" dirty="0">
               <a:solidFill>
@@ -26241,7 +26241,7 @@
                   <a:srgbClr val="00B0F0"/>
                 </a:solidFill>
               </a:rPr>
-              <a:t>1.2</a:t>
+              <a:t>1,2</a:t>
             </a:r>
             <a:endParaRPr lang="en-US" b="1" dirty="0">
               <a:solidFill>
@@ -26412,7 +26412,7 @@
                   <a:srgbClr val="00B0F0"/>
                 </a:solidFill>
               </a:rPr>
-              <a:t>0.607</a:t>
+              <a:t>0,607</a:t>
             </a:r>
             <a:endParaRPr lang="en-US" b="1" dirty="0">
               <a:solidFill>
@@ -26583,7 +26583,7 @@
                   <a:srgbClr val="00B0F0"/>
                 </a:solidFill>
               </a:rPr>
-              <a:t>0.706</a:t>
+              <a:t>0,706</a:t>
             </a:r>
             <a:endParaRPr lang="en-US" b="1" dirty="0">
               <a:solidFill>
@@ -26925,7 +26925,7 @@
                   <a:srgbClr val="00B0F0"/>
                 </a:solidFill>
               </a:rPr>
-              <a:t>12.2%</a:t>
+              <a:t>12,2%</a:t>
             </a:r>
             <a:endParaRPr lang="en-US" b="1" dirty="0">
               <a:solidFill>
@@ -26969,7 +26969,7 @@
                   <a:srgbClr val="00B0F0"/>
                 </a:solidFill>
               </a:rPr>
-              <a:t>0.12</a:t>
+              <a:t>0,12</a:t>
             </a:r>
             <a:endParaRPr lang="en-US" b="1" dirty="0">
               <a:solidFill>
@@ -27140,7 +27140,7 @@
                   <a:srgbClr val="00B0F0"/>
                 </a:solidFill>
               </a:rPr>
-              <a:t>10.5%</a:t>
+              <a:t>10,5%</a:t>
             </a:r>
             <a:endParaRPr lang="en-US" b="1" dirty="0">
               <a:solidFill>
@@ -27355,7 +27355,7 @@
                   <a:srgbClr val="00B0F0"/>
                 </a:solidFill>
               </a:rPr>
-              <a:t>0.</a:t>
+              <a:t>0,</a:t>
             </a:r>
             <a:r>
               <a:rPr lang="en-US" b="1" dirty="0">
@@ -27529,7 +27529,7 @@
                   <a:srgbClr val="00B0F0"/>
                 </a:solidFill>
               </a:rPr>
-              <a:t>35.9%</a:t>
+              <a:t>35,9%</a:t>
             </a:r>
             <a:endParaRPr lang="en-US" b="1" dirty="0">
               <a:solidFill>
@@ -27573,7 +27573,7 @@
                   <a:srgbClr val="00B0F0"/>
                 </a:solidFill>
               </a:rPr>
-              <a:t>0.</a:t>
+              <a:t>0,</a:t>
             </a:r>
             <a:r>
               <a:rPr lang="en-US" b="1" dirty="0">
@@ -27747,7 +27747,7 @@
                   <a:srgbClr val="00B0F0"/>
                 </a:solidFill>
               </a:rPr>
-              <a:t>0.6008</a:t>
+              <a:t>0,6008</a:t>
             </a:r>
           </a:p>
         </p:txBody>
@@ -27786,7 +27786,7 @@
                   <a:srgbClr val="00B0F0"/>
                 </a:solidFill>
               </a:rPr>
-              <a:t>0.</a:t>
+              <a:t>0,</a:t>
             </a:r>
             <a:r>
               <a:rPr lang="en-US" b="1" dirty="0">
